--- a/sber_autoподписка_hackathon.pptx
+++ b/sber_autoподписка_hackathon.pptx
@@ -2099,6 +2099,10 @@
             <a:prstDash val="solid"/>
           </a:ln>
         </p:spPr>
+        <p:txBody>
+          <a:bodyPr/>
+          <a:p/>
+        </p:txBody>
       </p:sp>
       <p:sp>
         <p:nvSpPr>
@@ -2128,6 +2132,10 @@
             <a:prstDash val="solid"/>
           </a:ln>
         </p:spPr>
+        <p:txBody>
+          <a:bodyPr/>
+          <a:p/>
+        </p:txBody>
       </p:sp>
       <p:sp>
         <p:nvSpPr>
@@ -2157,6 +2165,10 @@
             <a:prstDash val="solid"/>
           </a:ln>
         </p:spPr>
+        <p:txBody>
+          <a:bodyPr/>
+          <a:p/>
+        </p:txBody>
       </p:sp>
       <p:sp>
         <p:nvSpPr>
@@ -2184,6 +2196,10 @@
             <a:prstDash val="solid"/>
           </a:ln>
         </p:spPr>
+        <p:txBody>
+          <a:bodyPr/>
+          <a:p/>
+        </p:txBody>
       </p:sp>
       <p:sp>
         <p:nvSpPr>
@@ -2379,6 +2395,10 @@
             <a:prstDash val="solid"/>
           </a:ln>
         </p:spPr>
+        <p:txBody>
+          <a:bodyPr/>
+          <a:p/>
+        </p:txBody>
       </p:sp>
       <p:sp>
         <p:nvSpPr>
@@ -2406,6 +2426,10 @@
             <a:prstDash val="solid"/>
           </a:ln>
         </p:spPr>
+        <p:txBody>
+          <a:bodyPr/>
+          <a:p/>
+        </p:txBody>
       </p:sp>
       <p:sp>
         <p:nvSpPr>
@@ -2469,6 +2493,10 @@
             <a:prstDash val="solid"/>
           </a:ln>
         </p:spPr>
+        <p:txBody>
+          <a:bodyPr/>
+          <a:p/>
+        </p:txBody>
       </p:sp>
       <p:sp>
         <p:nvSpPr>
@@ -2500,7 +2528,7 @@
                   <a:srgbClr val="CADCFC"/>
                 </a:solidFill>
               </a:rPr>
-              <a:t>ROC-AUC 0.7289</a:t>
+              <a:t>ROC-AUC 0.7197</a:t>
             </a:r>
             <a:endParaRPr lang="en-US" sz="1150" dirty="0"/>
           </a:p>
@@ -2532,6 +2560,10 @@
             <a:prstDash val="solid"/>
           </a:ln>
         </p:spPr>
+        <p:txBody>
+          <a:bodyPr/>
+          <a:p/>
+        </p:txBody>
       </p:sp>
       <p:sp>
         <p:nvSpPr>
@@ -2599,7 +2631,7 @@
                   <a:srgbClr val="64748B"/>
                 </a:solidFill>
               </a:rPr>
-              <a:t>Машинное обучение · </a:t>
+              <a:t xml:space="preserve">Машинное обучение · </a:t>
             </a:r>
             <a:r>
               <a:rPr lang="ru-RU" sz="1000" dirty="0">
@@ -2607,7 +2639,7 @@
                   <a:srgbClr val="64748B"/>
                 </a:solidFill>
               </a:rPr>
-              <a:t>МИФИ / </a:t>
+              <a:t xml:space="preserve">МИФИ / </a:t>
             </a:r>
             <a:r>
               <a:rPr lang="en-US" sz="1000" dirty="0">
@@ -2623,7 +2655,7 @@
                   <a:srgbClr val="64748B"/>
                 </a:solidFill>
               </a:rPr>
-              <a:t> </a:t>
+              <a:t xml:space="preserve"> </a:t>
             </a:r>
             <a:r>
               <a:rPr lang="en-US" sz="1000" dirty="0">
@@ -2639,7 +2671,7 @@
                   <a:srgbClr val="64748B"/>
                 </a:solidFill>
               </a:rPr>
-              <a:t> Бегали уулу Манас </a:t>
+              <a:t xml:space="preserve"> Бегали уулу Манас </a:t>
             </a:r>
             <a:r>
               <a:rPr lang="en-US" sz="1000" dirty="0">
@@ -2710,6 +2742,10 @@
             <a:prstDash val="solid"/>
           </a:ln>
         </p:spPr>
+        <p:txBody>
+          <a:bodyPr/>
+          <a:p/>
+        </p:txBody>
       </p:sp>
       <p:sp>
         <p:nvSpPr>
@@ -2771,6 +2807,10 @@
             <a:prstDash val="solid"/>
           </a:ln>
         </p:spPr>
+        <p:txBody>
+          <a:bodyPr/>
+          <a:p/>
+        </p:txBody>
       </p:sp>
       <p:sp>
         <p:nvSpPr>
@@ -2803,6 +2843,10 @@
             </a:outerShdw>
           </a:effectLst>
         </p:spPr>
+        <p:txBody>
+          <a:bodyPr/>
+          <a:p/>
+        </p:txBody>
       </p:sp>
       <p:sp>
         <p:nvSpPr>
@@ -2900,6 +2944,10 @@
             <a:prstDash val="solid"/>
           </a:ln>
         </p:spPr>
+        <p:txBody>
+          <a:bodyPr/>
+          <a:p/>
+        </p:txBody>
       </p:sp>
       <p:sp>
         <p:nvSpPr>
@@ -3045,7 +3093,7 @@
                   <a:srgbClr val="1E2761"/>
                 </a:solidFill>
               </a:rPr>
-              <a:t>Построить модель, предсказывающую вероятность </a:t>
+              <a:t xml:space="preserve">Построить модель, предсказывающую вероятность </a:t>
             </a:r>
             <a:r>
               <a:rPr lang="en-US" sz="1200" b="1" dirty="0">
@@ -3061,7 +3109,7 @@
                   <a:srgbClr val="1E2761"/>
                 </a:solidFill>
               </a:rPr>
-              <a:t> пользователя на сайте.</a:t>
+              <a:t xml:space="preserve"> пользователя на сайте.</a:t>
             </a:r>
             <a:endParaRPr lang="en-US" sz="1200" dirty="0"/>
           </a:p>
@@ -3098,6 +3146,10 @@
             </a:outerShdw>
           </a:effectLst>
         </p:spPr>
+        <p:txBody>
+          <a:bodyPr/>
+          <a:p/>
+        </p:txBody>
       </p:sp>
       <p:sp>
         <p:nvSpPr>
@@ -3159,6 +3211,10 @@
             <a:prstDash val="solid"/>
           </a:ln>
         </p:spPr>
+        <p:txBody>
+          <a:bodyPr/>
+          <a:p/>
+        </p:txBody>
       </p:sp>
       <p:sp>
         <p:nvSpPr>
@@ -3256,6 +3312,10 @@
             <a:prstDash val="solid"/>
           </a:ln>
         </p:spPr>
+        <p:txBody>
+          <a:bodyPr/>
+          <a:p/>
+        </p:txBody>
       </p:sp>
       <p:sp>
         <p:nvSpPr>
@@ -3353,6 +3413,10 @@
             <a:prstDash val="solid"/>
           </a:ln>
         </p:spPr>
+        <p:txBody>
+          <a:bodyPr/>
+          <a:p/>
+        </p:txBody>
       </p:sp>
       <p:sp>
         <p:nvSpPr>
@@ -3452,6 +3516,10 @@
             <a:prstDash val="solid"/>
           </a:ln>
         </p:spPr>
+        <p:txBody>
+          <a:bodyPr/>
+          <a:p/>
+        </p:txBody>
       </p:sp>
       <p:sp>
         <p:nvSpPr>
@@ -3546,6 +3614,10 @@
             <a:prstDash val="solid"/>
           </a:ln>
         </p:spPr>
+        <p:txBody>
+          <a:bodyPr/>
+          <a:p/>
+        </p:txBody>
       </p:sp>
       <p:sp>
         <p:nvSpPr>
@@ -3607,6 +3679,10 @@
             <a:prstDash val="solid"/>
           </a:ln>
         </p:spPr>
+        <p:txBody>
+          <a:bodyPr/>
+          <a:p/>
+        </p:txBody>
       </p:sp>
       <p:sp>
         <p:nvSpPr>
@@ -3639,6 +3715,10 @@
             </a:outerShdw>
           </a:effectLst>
         </p:spPr>
+        <p:txBody>
+          <a:bodyPr/>
+          <a:p/>
+        </p:txBody>
       </p:sp>
       <p:sp>
         <p:nvSpPr>
@@ -3664,6 +3744,10 @@
             <a:prstDash val="solid"/>
           </a:ln>
         </p:spPr>
+        <p:txBody>
+          <a:bodyPr/>
+          <a:p/>
+        </p:txBody>
       </p:sp>
       <p:sp>
         <p:nvSpPr>
@@ -3804,6 +3888,10 @@
             </a:outerShdw>
           </a:effectLst>
         </p:spPr>
+        <p:txBody>
+          <a:bodyPr/>
+          <a:p/>
+        </p:txBody>
       </p:sp>
       <p:sp>
         <p:nvSpPr>
@@ -3829,6 +3917,10 @@
             <a:prstDash val="solid"/>
           </a:ln>
         </p:spPr>
+        <p:txBody>
+          <a:bodyPr/>
+          <a:p/>
+        </p:txBody>
       </p:sp>
       <p:sp>
         <p:nvSpPr>
@@ -3969,6 +4061,10 @@
             </a:outerShdw>
           </a:effectLst>
         </p:spPr>
+        <p:txBody>
+          <a:bodyPr/>
+          <a:p/>
+        </p:txBody>
       </p:sp>
       <p:sp>
         <p:nvSpPr>
@@ -3994,6 +4090,10 @@
             <a:prstDash val="solid"/>
           </a:ln>
         </p:spPr>
+        <p:txBody>
+          <a:bodyPr/>
+          <a:p/>
+        </p:txBody>
       </p:sp>
       <p:sp>
         <p:nvSpPr>
@@ -4134,6 +4234,10 @@
             </a:outerShdw>
           </a:effectLst>
         </p:spPr>
+        <p:txBody>
+          <a:bodyPr/>
+          <a:p/>
+        </p:txBody>
       </p:sp>
       <p:sp>
         <p:nvSpPr>
@@ -4159,6 +4263,10 @@
             <a:prstDash val="solid"/>
           </a:ln>
         </p:spPr>
+        <p:txBody>
+          <a:bodyPr/>
+          <a:p/>
+        </p:txBody>
       </p:sp>
       <p:sp>
         <p:nvSpPr>
@@ -4335,6 +4443,10 @@
             </a:outerShdw>
           </a:effectLst>
         </p:spPr>
+        <p:txBody>
+          <a:bodyPr/>
+          <a:p/>
+        </p:txBody>
       </p:sp>
       <p:sp>
         <p:nvSpPr>
@@ -4360,6 +4472,10 @@
             <a:prstDash val="solid"/>
           </a:ln>
         </p:spPr>
+        <p:txBody>
+          <a:bodyPr/>
+          <a:p/>
+        </p:txBody>
       </p:sp>
       <p:sp>
         <p:nvSpPr>
@@ -4464,6 +4580,10 @@
             </a:outerShdw>
           </a:effectLst>
         </p:spPr>
+        <p:txBody>
+          <a:bodyPr/>
+          <a:p/>
+        </p:txBody>
       </p:sp>
       <p:sp>
         <p:nvSpPr>
@@ -4489,6 +4609,10 @@
             <a:prstDash val="solid"/>
           </a:ln>
         </p:spPr>
+        <p:txBody>
+          <a:bodyPr/>
+          <a:p/>
+        </p:txBody>
       </p:sp>
       <p:sp>
         <p:nvSpPr>
@@ -4593,6 +4717,10 @@
             </a:outerShdw>
           </a:effectLst>
         </p:spPr>
+        <p:txBody>
+          <a:bodyPr/>
+          <a:p/>
+        </p:txBody>
       </p:sp>
       <p:sp>
         <p:nvSpPr>
@@ -4618,6 +4746,10 @@
             <a:prstDash val="solid"/>
           </a:ln>
         </p:spPr>
+        <p:txBody>
+          <a:bodyPr/>
+          <a:p/>
+        </p:txBody>
       </p:sp>
       <p:sp>
         <p:nvSpPr>
@@ -4722,6 +4854,10 @@
             </a:outerShdw>
           </a:effectLst>
         </p:spPr>
+        <p:txBody>
+          <a:bodyPr/>
+          <a:p/>
+        </p:txBody>
       </p:sp>
       <p:sp>
         <p:nvSpPr>
@@ -4747,6 +4883,10 @@
             <a:prstDash val="solid"/>
           </a:ln>
         </p:spPr>
+        <p:txBody>
+          <a:bodyPr/>
+          <a:p/>
+        </p:txBody>
       </p:sp>
       <p:sp>
         <p:nvSpPr>
@@ -4851,6 +4991,10 @@
             </a:outerShdw>
           </a:effectLst>
         </p:spPr>
+        <p:txBody>
+          <a:bodyPr/>
+          <a:p/>
+        </p:txBody>
       </p:sp>
       <p:sp>
         <p:nvSpPr>
@@ -4876,6 +5020,10 @@
             <a:prstDash val="solid"/>
           </a:ln>
         </p:spPr>
+        <p:txBody>
+          <a:bodyPr/>
+          <a:p/>
+        </p:txBody>
       </p:sp>
       <p:sp>
         <p:nvSpPr>
@@ -4980,6 +5128,10 @@
             </a:outerShdw>
           </a:effectLst>
         </p:spPr>
+        <p:txBody>
+          <a:bodyPr/>
+          <a:p/>
+        </p:txBody>
       </p:sp>
       <p:sp>
         <p:nvSpPr>
@@ -5005,6 +5157,10 @@
             <a:prstDash val="solid"/>
           </a:ln>
         </p:spPr>
+        <p:txBody>
+          <a:bodyPr/>
+          <a:p/>
+        </p:txBody>
       </p:sp>
       <p:sp>
         <p:nvSpPr>
@@ -5135,6 +5291,10 @@
             <a:prstDash val="solid"/>
           </a:ln>
         </p:spPr>
+        <p:txBody>
+          <a:bodyPr/>
+          <a:p/>
+        </p:txBody>
       </p:sp>
       <p:sp>
         <p:nvSpPr>
@@ -5196,6 +5356,10 @@
             <a:prstDash val="solid"/>
           </a:ln>
         </p:spPr>
+        <p:txBody>
+          <a:bodyPr/>
+          <a:p/>
+        </p:txBody>
       </p:sp>
       <p:sp>
         <p:nvSpPr>
@@ -5221,6 +5385,10 @@
             <a:prstDash val="solid"/>
           </a:ln>
         </p:spPr>
+        <p:txBody>
+          <a:bodyPr/>
+          <a:p/>
+        </p:txBody>
       </p:sp>
       <p:sp>
         <p:nvSpPr>
@@ -5252,7 +5420,7 @@
                   <a:srgbClr val="02C39A"/>
                 </a:solidFill>
               </a:rPr>
-              <a:t>Итого: 23 признака для модели  |  </a:t>
+              <a:t xml:space="preserve">Итого: 23 признака для модели  |  </a:t>
             </a:r>
             <a:r>
               <a:rPr lang="ru-RU" sz="1200" b="1" dirty="0">
@@ -5268,7 +5436,7 @@
                   <a:srgbClr val="02C39A"/>
                 </a:solidFill>
               </a:rPr>
-              <a:t> </a:t>
+              <a:t xml:space="preserve"> </a:t>
             </a:r>
             <a:r>
               <a:rPr lang="en-US" sz="1200" b="1" dirty="0" err="1">
@@ -5284,7 +5452,7 @@
                   <a:srgbClr val="02C39A"/>
                 </a:solidFill>
               </a:rPr>
-              <a:t>  +  7 </a:t>
+              <a:t xml:space="preserve">  +  7 </a:t>
             </a:r>
             <a:r>
               <a:rPr lang="en-US" sz="1200" b="1" dirty="0" err="1">
@@ -5322,6 +5490,10 @@
             <a:prstDash val="solid"/>
           </a:ln>
         </p:spPr>
+        <p:txBody>
+          <a:bodyPr/>
+          <a:p/>
+        </p:txBody>
       </p:sp>
       <p:sp>
         <p:nvSpPr>
@@ -5399,6 +5571,10 @@
             <a:prstDash val="solid"/>
           </a:ln>
         </p:spPr>
+        <p:txBody>
+          <a:bodyPr/>
+          <a:p/>
+        </p:txBody>
       </p:sp>
       <p:sp>
         <p:nvSpPr>
@@ -5496,6 +5672,10 @@
             <a:prstDash val="solid"/>
           </a:ln>
         </p:spPr>
+        <p:txBody>
+          <a:bodyPr/>
+          <a:p/>
+        </p:txBody>
       </p:sp>
       <p:sp>
         <p:nvSpPr>
@@ -5593,6 +5773,10 @@
             <a:prstDash val="solid"/>
           </a:ln>
         </p:spPr>
+        <p:txBody>
+          <a:bodyPr/>
+          <a:p/>
+        </p:txBody>
       </p:sp>
       <p:sp>
         <p:nvSpPr>
@@ -5690,6 +5874,10 @@
             <a:prstDash val="solid"/>
           </a:ln>
         </p:spPr>
+        <p:txBody>
+          <a:bodyPr/>
+          <a:p/>
+        </p:txBody>
       </p:sp>
       <p:sp>
         <p:nvSpPr>
@@ -5787,6 +5975,10 @@
             <a:prstDash val="solid"/>
           </a:ln>
         </p:spPr>
+        <p:txBody>
+          <a:bodyPr/>
+          <a:p/>
+        </p:txBody>
       </p:sp>
       <p:sp>
         <p:nvSpPr>
@@ -5884,6 +6076,10 @@
             <a:prstDash val="solid"/>
           </a:ln>
         </p:spPr>
+        <p:txBody>
+          <a:bodyPr/>
+          <a:p/>
+        </p:txBody>
       </p:sp>
       <p:sp>
         <p:nvSpPr>
@@ -5981,6 +6177,10 @@
             <a:prstDash val="solid"/>
           </a:ln>
         </p:spPr>
+        <p:txBody>
+          <a:bodyPr/>
+          <a:p/>
+        </p:txBody>
       </p:sp>
       <p:sp>
         <p:nvSpPr>
@@ -6078,6 +6278,10 @@
             <a:prstDash val="solid"/>
           </a:ln>
         </p:spPr>
+        <p:txBody>
+          <a:bodyPr/>
+          <a:p/>
+        </p:txBody>
       </p:sp>
       <p:sp>
         <p:nvSpPr>
@@ -6175,6 +6379,10 @@
             <a:prstDash val="solid"/>
           </a:ln>
         </p:spPr>
+        <p:txBody>
+          <a:bodyPr/>
+          <a:p/>
+        </p:txBody>
       </p:sp>
       <p:sp>
         <p:nvSpPr>
@@ -6272,6 +6480,10 @@
             <a:prstDash val="solid"/>
           </a:ln>
         </p:spPr>
+        <p:txBody>
+          <a:bodyPr/>
+          <a:p/>
+        </p:txBody>
       </p:sp>
       <p:sp>
         <p:nvSpPr>
@@ -6371,6 +6583,10 @@
             <a:prstDash val="solid"/>
           </a:ln>
         </p:spPr>
+        <p:txBody>
+          <a:bodyPr/>
+          <a:p/>
+        </p:txBody>
       </p:sp>
       <p:sp>
         <p:nvSpPr>
@@ -6432,6 +6648,10 @@
             <a:prstDash val="solid"/>
           </a:ln>
         </p:spPr>
+        <p:txBody>
+          <a:bodyPr/>
+          <a:p/>
+        </p:txBody>
       </p:sp>
       <p:sp>
         <p:nvSpPr>
@@ -6529,6 +6749,10 @@
             <a:prstDash val="solid"/>
           </a:ln>
         </p:spPr>
+        <p:txBody>
+          <a:bodyPr/>
+          <a:p/>
+        </p:txBody>
       </p:sp>
       <p:sp>
         <p:nvSpPr>
@@ -6626,6 +6850,10 @@
             <a:prstDash val="solid"/>
           </a:ln>
         </p:spPr>
+        <p:txBody>
+          <a:bodyPr/>
+          <a:p/>
+        </p:txBody>
       </p:sp>
       <p:sp>
         <p:nvSpPr>
@@ -6723,6 +6951,10 @@
             <a:prstDash val="solid"/>
           </a:ln>
         </p:spPr>
+        <p:txBody>
+          <a:bodyPr/>
+          <a:p/>
+        </p:txBody>
       </p:sp>
       <p:sp>
         <p:nvSpPr>
@@ -6820,6 +7052,10 @@
             <a:prstDash val="solid"/>
           </a:ln>
         </p:spPr>
+        <p:txBody>
+          <a:bodyPr/>
+          <a:p/>
+        </p:txBody>
       </p:sp>
       <p:sp>
         <p:nvSpPr>
@@ -6917,6 +7153,10 @@
             <a:prstDash val="solid"/>
           </a:ln>
         </p:spPr>
+        <p:txBody>
+          <a:bodyPr/>
+          <a:p/>
+        </p:txBody>
       </p:sp>
       <p:sp>
         <p:nvSpPr>
@@ -7014,6 +7254,10 @@
             <a:prstDash val="solid"/>
           </a:ln>
         </p:spPr>
+        <p:txBody>
+          <a:bodyPr/>
+          <a:p/>
+        </p:txBody>
       </p:sp>
       <p:sp>
         <p:nvSpPr>
@@ -7115,6 +7359,10 @@
             <a:prstDash val="solid"/>
           </a:ln>
         </p:spPr>
+        <p:txBody>
+          <a:bodyPr/>
+          <a:p/>
+        </p:txBody>
       </p:sp>
       <p:sp>
         <p:nvSpPr>
@@ -7209,6 +7457,10 @@
             <a:prstDash val="solid"/>
           </a:ln>
         </p:spPr>
+        <p:txBody>
+          <a:bodyPr/>
+          <a:p/>
+        </p:txBody>
       </p:sp>
       <p:sp>
         <p:nvSpPr>
@@ -7270,6 +7522,10 @@
             <a:prstDash val="solid"/>
           </a:ln>
         </p:spPr>
+        <p:txBody>
+          <a:bodyPr/>
+          <a:p/>
+        </p:txBody>
       </p:sp>
       <p:sp>
         <p:nvSpPr>
@@ -7302,6 +7558,10 @@
             </a:outerShdw>
           </a:effectLst>
         </p:spPr>
+        <p:txBody>
+          <a:bodyPr/>
+          <a:p/>
+        </p:txBody>
       </p:sp>
       <p:sp>
         <p:nvSpPr>
@@ -7327,6 +7587,10 @@
             <a:prstDash val="solid"/>
           </a:ln>
         </p:spPr>
+        <p:txBody>
+          <a:bodyPr/>
+          <a:p/>
+        </p:txBody>
       </p:sp>
       <p:sp>
         <p:nvSpPr>
@@ -7394,7 +7658,7 @@
                   <a:srgbClr val="1E2761"/>
                 </a:solidFill>
               </a:rPr>
-              <a:t>Train: 1 488 033 строк</a:t>
+              <a:t>Train: 1 487 448 строк</a:t>
             </a:r>
             <a:endParaRPr lang="en-US" sz="1100" dirty="0"/>
           </a:p>
@@ -7408,7 +7672,7 @@
                   <a:srgbClr val="1E2761"/>
                 </a:solidFill>
               </a:rPr>
-              <a:t>Test:    372 009 строк</a:t>
+              <a:t>Test:    372 594 строк</a:t>
             </a:r>
             <a:endParaRPr lang="en-US" sz="1100" dirty="0"/>
           </a:p>
@@ -7422,7 +7686,7 @@
                   <a:srgbClr val="1E2761"/>
                 </a:solidFill>
               </a:rPr>
-              <a:t>Стратификация: 80/20</a:t>
+              <a:t>GroupShuffleSplit по client_id (80/20)</a:t>
             </a:r>
             <a:endParaRPr lang="en-US" sz="1100" dirty="0"/>
           </a:p>
@@ -7473,6 +7737,10 @@
             </a:outerShdw>
           </a:effectLst>
         </p:spPr>
+        <p:txBody>
+          <a:bodyPr/>
+          <a:p/>
+        </p:txBody>
       </p:sp>
       <p:sp>
         <p:nvSpPr>
@@ -7498,6 +7766,10 @@
             <a:prstDash val="solid"/>
           </a:ln>
         </p:spPr>
+        <p:txBody>
+          <a:bodyPr/>
+          <a:p/>
+        </p:txBody>
       </p:sp>
       <p:sp>
         <p:nvSpPr>
@@ -7619,7 +7891,7 @@
                 <a:ea typeface="Consolas" pitchFamily="34" charset="-122"/>
                 <a:cs typeface="Consolas" pitchFamily="34" charset="-120"/>
               </a:rPr>
-              <a:t>scale_pos_weight: 46.7</a:t>
+              <a:t>scale_pos_weight: 46.8</a:t>
             </a:r>
             <a:endParaRPr lang="en-US" sz="1100" dirty="0"/>
           </a:p>
@@ -7656,6 +7928,10 @@
             </a:outerShdw>
           </a:effectLst>
         </p:spPr>
+        <p:txBody>
+          <a:bodyPr/>
+          <a:p/>
+        </p:txBody>
       </p:sp>
       <p:sp>
         <p:nvSpPr>
@@ -7681,6 +7957,10 @@
             <a:prstDash val="solid"/>
           </a:ln>
         </p:spPr>
+        <p:txBody>
+          <a:bodyPr/>
+          <a:p/>
+        </p:txBody>
       </p:sp>
       <p:sp>
         <p:nvSpPr>
@@ -7748,7 +8028,7 @@
                   <a:srgbClr val="02C39A"/>
                 </a:solidFill>
               </a:rPr>
-              <a:t>0.7289</a:t>
+              <a:t>0.7197</a:t>
             </a:r>
             <a:endParaRPr lang="en-US" sz="4400" dirty="0"/>
           </a:p>
@@ -7784,7 +8064,7 @@
                   <a:srgbClr val="CADCFC"/>
                 </a:solidFill>
               </a:rPr>
-              <a:t>Цель была ≥ 0.65  →  превышена на +0.079</a:t>
+              <a:t>Цель была ≥ 0.65  →  превышена на +0.070</a:t>
             </a:r>
             <a:endParaRPr lang="en-US" sz="900" dirty="0"/>
           </a:p>
@@ -7821,6 +8101,10 @@
             </a:outerShdw>
           </a:effectLst>
         </p:spPr>
+        <p:txBody>
+          <a:bodyPr/>
+          <a:p/>
+        </p:txBody>
       </p:sp>
       <p:sp>
         <p:nvSpPr>
@@ -7905,6 +8189,10 @@
             </a:outerShdw>
           </a:effectLst>
         </p:spPr>
+        <p:txBody>
+          <a:bodyPr/>
+          <a:p/>
+        </p:txBody>
       </p:sp>
       <p:sp>
         <p:nvSpPr>
@@ -8015,6 +8303,10 @@
             <a:prstDash val="solid"/>
           </a:ln>
         </p:spPr>
+        <p:txBody>
+          <a:bodyPr/>
+          <a:p/>
+        </p:txBody>
       </p:sp>
       <p:sp>
         <p:nvSpPr>
@@ -8076,6 +8368,10 @@
             <a:prstDash val="solid"/>
           </a:ln>
         </p:spPr>
+        <p:txBody>
+          <a:bodyPr/>
+          <a:p/>
+        </p:txBody>
       </p:sp>
       <p:sp>
         <p:nvSpPr>
@@ -8108,6 +8404,10 @@
             </a:outerShdw>
           </a:effectLst>
         </p:spPr>
+        <p:txBody>
+          <a:bodyPr/>
+          <a:p/>
+        </p:txBody>
       </p:sp>
       <p:sp>
         <p:nvSpPr>
@@ -8192,6 +8492,10 @@
             </a:outerShdw>
           </a:effectLst>
         </p:spPr>
+        <p:txBody>
+          <a:bodyPr/>
+          <a:p/>
+        </p:txBody>
       </p:sp>
       <p:sp>
         <p:nvSpPr>
@@ -8305,6 +8609,10 @@
             <a:prstDash val="solid"/>
           </a:ln>
         </p:spPr>
+        <p:txBody>
+          <a:bodyPr/>
+          <a:p/>
+        </p:txBody>
       </p:sp>
       <p:sp>
         <p:nvSpPr>
@@ -8330,6 +8638,10 @@
             <a:prstDash val="solid"/>
           </a:ln>
         </p:spPr>
+        <p:txBody>
+          <a:bodyPr/>
+          <a:p/>
+        </p:txBody>
       </p:sp>
       <p:sp>
         <p:nvSpPr>
@@ -8465,6 +8777,10 @@
             <a:prstDash val="solid"/>
           </a:ln>
         </p:spPr>
+        <p:txBody>
+          <a:bodyPr/>
+          <a:p/>
+        </p:txBody>
       </p:sp>
       <p:sp>
         <p:nvSpPr>
@@ -8490,6 +8806,10 @@
             <a:prstDash val="solid"/>
           </a:ln>
         </p:spPr>
+        <p:txBody>
+          <a:bodyPr/>
+          <a:p/>
+        </p:txBody>
       </p:sp>
       <p:sp>
         <p:nvSpPr>
@@ -8625,6 +8945,10 @@
             <a:prstDash val="solid"/>
           </a:ln>
         </p:spPr>
+        <p:txBody>
+          <a:bodyPr/>
+          <a:p/>
+        </p:txBody>
       </p:sp>
       <p:sp>
         <p:nvSpPr>
@@ -8650,6 +8974,10 @@
             <a:prstDash val="solid"/>
           </a:ln>
         </p:spPr>
+        <p:txBody>
+          <a:bodyPr/>
+          <a:p/>
+        </p:txBody>
       </p:sp>
       <p:sp>
         <p:nvSpPr>
@@ -8785,6 +9113,10 @@
             <a:prstDash val="solid"/>
           </a:ln>
         </p:spPr>
+        <p:txBody>
+          <a:bodyPr/>
+          <a:p/>
+        </p:txBody>
       </p:sp>
       <p:sp>
         <p:nvSpPr>
@@ -8810,6 +9142,10 @@
             <a:prstDash val="solid"/>
           </a:ln>
         </p:spPr>
+        <p:txBody>
+          <a:bodyPr/>
+          <a:p/>
+        </p:txBody>
       </p:sp>
       <p:sp>
         <p:nvSpPr>
@@ -8945,6 +9281,10 @@
             <a:prstDash val="solid"/>
           </a:ln>
         </p:spPr>
+        <p:txBody>
+          <a:bodyPr/>
+          <a:p/>
+        </p:txBody>
       </p:sp>
       <p:sp>
         <p:nvSpPr>
@@ -8970,6 +9310,10 @@
             <a:prstDash val="solid"/>
           </a:ln>
         </p:spPr>
+        <p:txBody>
+          <a:bodyPr/>
+          <a:p/>
+        </p:txBody>
       </p:sp>
       <p:sp>
         <p:nvSpPr>
@@ -9136,6 +9480,10 @@
             <a:prstDash val="solid"/>
           </a:ln>
         </p:spPr>
+        <p:txBody>
+          <a:bodyPr/>
+          <a:p/>
+        </p:txBody>
       </p:sp>
       <p:sp>
         <p:nvSpPr>
@@ -9197,6 +9545,10 @@
             <a:prstDash val="solid"/>
           </a:ln>
         </p:spPr>
+        <p:txBody>
+          <a:bodyPr/>
+          <a:p/>
+        </p:txBody>
       </p:sp>
       <p:sp>
         <p:nvSpPr>
@@ -9229,6 +9581,10 @@
             </a:outerShdw>
           </a:effectLst>
         </p:spPr>
+        <p:txBody>
+          <a:bodyPr/>
+          <a:p/>
+        </p:txBody>
       </p:sp>
       <p:sp>
         <p:nvSpPr>
@@ -9254,6 +9610,10 @@
             <a:prstDash val="solid"/>
           </a:ln>
         </p:spPr>
+        <p:txBody>
+          <a:bodyPr/>
+          <a:p/>
+        </p:txBody>
       </p:sp>
       <p:sp>
         <p:nvSpPr>
@@ -9444,6 +9804,10 @@
             </a:outerShdw>
           </a:effectLst>
         </p:spPr>
+        <p:txBody>
+          <a:bodyPr/>
+          <a:p/>
+        </p:txBody>
       </p:sp>
       <p:sp>
         <p:nvSpPr>
@@ -9469,6 +9833,10 @@
             <a:prstDash val="solid"/>
           </a:ln>
         </p:spPr>
+        <p:txBody>
+          <a:bodyPr/>
+          <a:p/>
+        </p:txBody>
       </p:sp>
       <p:sp>
         <p:nvSpPr>
@@ -9659,6 +10027,10 @@
             </a:outerShdw>
           </a:effectLst>
         </p:spPr>
+        <p:txBody>
+          <a:bodyPr/>
+          <a:p/>
+        </p:txBody>
       </p:sp>
       <p:sp>
         <p:nvSpPr>
@@ -9684,6 +10056,10 @@
             <a:prstDash val="solid"/>
           </a:ln>
         </p:spPr>
+        <p:txBody>
+          <a:bodyPr/>
+          <a:p/>
+        </p:txBody>
       </p:sp>
       <p:sp>
         <p:nvSpPr>
@@ -9874,6 +10250,10 @@
             </a:outerShdw>
           </a:effectLst>
         </p:spPr>
+        <p:txBody>
+          <a:bodyPr/>
+          <a:p/>
+        </p:txBody>
       </p:sp>
       <p:sp>
         <p:nvSpPr>
@@ -9899,6 +10279,10 @@
             <a:prstDash val="solid"/>
           </a:ln>
         </p:spPr>
+        <p:txBody>
+          <a:bodyPr/>
+          <a:p/>
+        </p:txBody>
       </p:sp>
       <p:sp>
         <p:nvSpPr>
@@ -10053,6 +10437,10 @@
             </a:outerShdw>
           </a:effectLst>
         </p:spPr>
+        <p:txBody>
+          <a:bodyPr/>
+          <a:p/>
+        </p:txBody>
       </p:sp>
       <p:sp>
         <p:nvSpPr>
@@ -10116,6 +10504,10 @@
             <a:prstDash val="solid"/>
           </a:ln>
         </p:spPr>
+        <p:txBody>
+          <a:bodyPr/>
+          <a:p/>
+        </p:txBody>
       </p:sp>
       <p:sp>
         <p:nvSpPr>
@@ -10254,6 +10646,10 @@
             <a:prstDash val="solid"/>
           </a:ln>
         </p:spPr>
+        <p:txBody>
+          <a:bodyPr/>
+          <a:p/>
+        </p:txBody>
       </p:sp>
       <p:sp>
         <p:nvSpPr>
@@ -10392,6 +10788,10 @@
             <a:prstDash val="solid"/>
           </a:ln>
         </p:spPr>
+        <p:txBody>
+          <a:bodyPr/>
+          <a:p/>
+        </p:txBody>
       </p:sp>
       <p:sp>
         <p:nvSpPr>
@@ -10530,6 +10930,10 @@
             <a:prstDash val="solid"/>
           </a:ln>
         </p:spPr>
+        <p:txBody>
+          <a:bodyPr/>
+          <a:p/>
+        </p:txBody>
       </p:sp>
       <p:sp>
         <p:nvSpPr>
@@ -10673,6 +11077,10 @@
             </a:outerShdw>
           </a:effectLst>
         </p:spPr>
+        <p:txBody>
+          <a:bodyPr/>
+          <a:p/>
+        </p:txBody>
       </p:sp>
       <p:sp>
         <p:nvSpPr>
@@ -10776,7 +11184,7 @@
                   <a:srgbClr val="FFFFFF"/>
                 </a:solidFill>
               </a:rPr>
-              <a:t>5.</a:t>
+              <a:t>5.27 мс</a:t>
             </a:r>
             <a:r>
               <a:rPr lang="ru-RU" sz="1100" b="1" dirty="0">
@@ -10784,7 +11192,7 @@
                   <a:srgbClr val="FFFFFF"/>
                 </a:solidFill>
               </a:rPr>
-              <a:t>88</a:t>
+              <a:t/>
             </a:r>
             <a:r>
               <a:rPr lang="en-US" sz="1100" b="1" dirty="0">
@@ -10792,7 +11200,7 @@
                   <a:srgbClr val="FFFFFF"/>
                 </a:solidFill>
               </a:rPr>
-              <a:t> мс</a:t>
+              <a:t xml:space="preserve"/>
             </a:r>
             <a:endParaRPr lang="en-US" sz="1100" dirty="0"/>
           </a:p>
@@ -10826,6 +11234,10 @@
             <a:prstDash val="solid"/>
           </a:ln>
         </p:spPr>
+        <p:txBody>
+          <a:bodyPr/>
+          <a:p/>
+        </p:txBody>
       </p:sp>
       <p:sp>
         <p:nvSpPr>
@@ -10893,7 +11305,7 @@
                   <a:srgbClr val="FFFFFF"/>
                 </a:solidFill>
               </a:rPr>
-              <a:t>5.20 мс</a:t>
+              <a:t>5.14 мс</a:t>
             </a:r>
             <a:endParaRPr lang="en-US" sz="1100" dirty="0"/>
           </a:p>
@@ -10927,6 +11339,10 @@
             <a:prstDash val="solid"/>
           </a:ln>
         </p:spPr>
+        <p:txBody>
+          <a:bodyPr/>
+          <a:p/>
+        </p:txBody>
       </p:sp>
       <p:sp>
         <p:nvSpPr>
@@ -10994,7 +11410,7 @@
                   <a:srgbClr val="FFFFFF"/>
                 </a:solidFill>
               </a:rPr>
-              <a:t>10.</a:t>
+              <a:t>8.77 мс</a:t>
             </a:r>
             <a:r>
               <a:rPr lang="ru-RU" sz="1100" b="1" dirty="0">
@@ -11002,7 +11418,7 @@
                   <a:srgbClr val="FFFFFF"/>
                 </a:solidFill>
               </a:rPr>
-              <a:t>69</a:t>
+              <a:t/>
             </a:r>
             <a:r>
               <a:rPr lang="en-US" sz="1100" b="1" dirty="0">
@@ -11010,7 +11426,7 @@
                   <a:srgbClr val="FFFFFF"/>
                 </a:solidFill>
               </a:rPr>
-              <a:t> мс</a:t>
+              <a:t xml:space="preserve"/>
             </a:r>
             <a:endParaRPr lang="en-US" sz="1100" dirty="0"/>
           </a:p>
@@ -11044,6 +11460,10 @@
             <a:prstDash val="solid"/>
           </a:ln>
         </p:spPr>
+        <p:txBody>
+          <a:bodyPr/>
+          <a:p/>
+        </p:txBody>
       </p:sp>
       <p:sp>
         <p:nvSpPr>
@@ -11111,7 +11531,7 @@
                   <a:srgbClr val="FFFFFF"/>
                 </a:solidFill>
               </a:rPr>
-              <a:t>6.41 мс</a:t>
+              <a:t>6.46 мс</a:t>
             </a:r>
             <a:endParaRPr lang="en-US" sz="1100" dirty="0"/>
           </a:p>
@@ -11145,6 +11565,10 @@
             <a:prstDash val="solid"/>
           </a:ln>
         </p:spPr>
+        <p:txBody>
+          <a:bodyPr/>
+          <a:p/>
+        </p:txBody>
       </p:sp>
       <p:sp>
         <p:nvSpPr>
@@ -11279,6 +11703,10 @@
             <a:prstDash val="solid"/>
           </a:ln>
         </p:spPr>
+        <p:txBody>
+          <a:bodyPr/>
+          <a:p/>
+        </p:txBody>
       </p:sp>
       <p:sp>
         <p:nvSpPr>
@@ -11308,6 +11736,10 @@
             <a:prstDash val="solid"/>
           </a:ln>
         </p:spPr>
+        <p:txBody>
+          <a:bodyPr/>
+          <a:p/>
+        </p:txBody>
       </p:sp>
       <p:sp>
         <p:nvSpPr>
@@ -11333,6 +11765,10 @@
             <a:prstDash val="solid"/>
           </a:ln>
         </p:spPr>
+        <p:txBody>
+          <a:bodyPr/>
+          <a:p/>
+        </p:txBody>
       </p:sp>
       <p:sp>
         <p:nvSpPr>
@@ -11403,6 +11839,10 @@
             </a:outerShdw>
           </a:effectLst>
         </p:spPr>
+        <p:txBody>
+          <a:bodyPr/>
+          <a:p/>
+        </p:txBody>
       </p:sp>
       <p:sp>
         <p:nvSpPr>
@@ -11434,7 +11874,7 @@
                   <a:srgbClr val="02C39A"/>
                 </a:solidFill>
               </a:rPr>
-              <a:t>0.7289</a:t>
+              <a:t>0.7197</a:t>
             </a:r>
             <a:endParaRPr lang="en-US" sz="2200" dirty="0"/>
           </a:p>
@@ -11545,6 +11985,10 @@
             </a:outerShdw>
           </a:effectLst>
         </p:spPr>
+        <p:txBody>
+          <a:bodyPr/>
+          <a:p/>
+        </p:txBody>
       </p:sp>
       <p:sp>
         <p:nvSpPr>
@@ -11576,7 +12020,7 @@
                   <a:srgbClr val="02C39A"/>
                 </a:solidFill>
               </a:rPr>
-              <a:t>0.6346</a:t>
+              <a:t>0.6305</a:t>
             </a:r>
             <a:endParaRPr lang="en-US" sz="2200" dirty="0"/>
           </a:p>
@@ -11648,7 +12092,7 @@
                   <a:srgbClr val="64748B"/>
                 </a:solidFill>
               </a:rPr>
-              <a:t>прирост +0.0943</a:t>
+              <a:t>прирост +0.0893</a:t>
             </a:r>
             <a:endParaRPr lang="en-US" sz="800" dirty="0"/>
           </a:p>
@@ -11687,6 +12131,10 @@
             </a:outerShdw>
           </a:effectLst>
         </p:spPr>
+        <p:txBody>
+          <a:bodyPr/>
+          <a:p/>
+        </p:txBody>
       </p:sp>
       <p:sp>
         <p:nvSpPr>
@@ -11718,7 +12166,7 @@
                   <a:srgbClr val="02C39A"/>
                 </a:solidFill>
               </a:rPr>
-              <a:t>5.</a:t>
+              <a:t>5.27 мс</a:t>
             </a:r>
             <a:r>
               <a:rPr lang="ru-RU" sz="2200" b="1" dirty="0">
@@ -11726,7 +12174,7 @@
                   <a:srgbClr val="02C39A"/>
                 </a:solidFill>
               </a:rPr>
-              <a:t>88</a:t>
+              <a:t/>
             </a:r>
             <a:r>
               <a:rPr lang="en-US" sz="2200" b="1" dirty="0">
@@ -11734,7 +12182,7 @@
                   <a:srgbClr val="02C39A"/>
                 </a:solidFill>
               </a:rPr>
-              <a:t> мс</a:t>
+              <a:t xml:space="preserve"/>
             </a:r>
             <a:endParaRPr lang="en-US" sz="2200" dirty="0"/>
           </a:p>
@@ -11845,6 +12293,10 @@
             </a:outerShdw>
           </a:effectLst>
         </p:spPr>
+        <p:txBody>
+          <a:bodyPr/>
+          <a:p/>
+        </p:txBody>
       </p:sp>
       <p:sp>
         <p:nvSpPr>
@@ -12014,6 +12466,10 @@
             <a:prstDash val="solid"/>
           </a:ln>
         </p:spPr>
+        <p:txBody>
+          <a:bodyPr/>
+          <a:p/>
+        </p:txBody>
       </p:sp>
       <p:sp>
         <p:nvSpPr>
@@ -12075,6 +12531,10 @@
             <a:prstDash val="solid"/>
           </a:ln>
         </p:spPr>
+        <p:txBody>
+          <a:bodyPr/>
+          <a:p/>
+        </p:txBody>
       </p:sp>
       <p:sp>
         <p:nvSpPr>
@@ -12136,6 +12596,10 @@
             <a:prstDash val="solid"/>
           </a:ln>
         </p:spPr>
+        <p:txBody>
+          <a:bodyPr/>
+          <a:p/>
+        </p:txBody>
       </p:sp>
       <p:sp>
         <p:nvSpPr>
@@ -12197,6 +12661,10 @@
             <a:prstDash val="solid"/>
           </a:ln>
         </p:spPr>
+        <p:txBody>
+          <a:bodyPr/>
+          <a:p/>
+        </p:txBody>
       </p:sp>
       <p:sp>
         <p:nvSpPr>
@@ -12296,6 +12764,10 @@
             <a:prstDash val="solid"/>
           </a:ln>
         </p:spPr>
+        <p:txBody>
+          <a:bodyPr/>
+          <a:p/>
+        </p:txBody>
       </p:sp>
       <p:sp>
         <p:nvSpPr>
@@ -12398,6 +12870,10 @@
             <a:prstDash val="solid"/>
           </a:ln>
         </p:spPr>
+        <p:txBody>
+          <a:bodyPr/>
+          <a:p/>
+        </p:txBody>
       </p:sp>
       <p:sp>
         <p:nvSpPr>
@@ -12500,6 +12976,10 @@
             <a:prstDash val="solid"/>
           </a:ln>
         </p:spPr>
+        <p:txBody>
+          <a:bodyPr/>
+          <a:p/>
+        </p:txBody>
       </p:sp>
       <p:sp>
         <p:nvSpPr>
@@ -12602,6 +13082,10 @@
             <a:prstDash val="solid"/>
           </a:ln>
         </p:spPr>
+        <p:txBody>
+          <a:bodyPr/>
+          <a:p/>
+        </p:txBody>
       </p:sp>
       <p:sp>
         <p:nvSpPr>
@@ -12704,6 +13188,10 @@
             <a:prstDash val="solid"/>
           </a:ln>
         </p:spPr>
+        <p:txBody>
+          <a:bodyPr/>
+          <a:p/>
+        </p:txBody>
       </p:sp>
       <p:sp>
         <p:nvSpPr>
@@ -12806,6 +13294,10 @@
             <a:prstDash val="solid"/>
           </a:ln>
         </p:spPr>
+        <p:txBody>
+          <a:bodyPr/>
+          <a:p/>
+        </p:txBody>
       </p:sp>
       <p:sp>
         <p:nvSpPr>
@@ -12908,6 +13400,10 @@
             <a:prstDash val="solid"/>
           </a:ln>
         </p:spPr>
+        <p:txBody>
+          <a:bodyPr/>
+          <a:p/>
+        </p:txBody>
       </p:sp>
       <p:sp>
         <p:nvSpPr>

--- a/sber_autoподписка_hackathon.pptx
+++ b/sber_autoподписка_hackathon.pptx
@@ -2101,7 +2101,10 @@
         </p:spPr>
         <p:txBody>
           <a:bodyPr/>
-          <a:p/>
+          <a:lstStyle/>
+          <a:p>
+            <a:endParaRPr/>
+          </a:p>
         </p:txBody>
       </p:sp>
       <p:sp>
@@ -2134,7 +2137,10 @@
         </p:spPr>
         <p:txBody>
           <a:bodyPr/>
-          <a:p/>
+          <a:lstStyle/>
+          <a:p>
+            <a:endParaRPr/>
+          </a:p>
         </p:txBody>
       </p:sp>
       <p:sp>
@@ -2167,7 +2173,10 @@
         </p:spPr>
         <p:txBody>
           <a:bodyPr/>
-          <a:p/>
+          <a:lstStyle/>
+          <a:p>
+            <a:endParaRPr/>
+          </a:p>
         </p:txBody>
       </p:sp>
       <p:sp>
@@ -2198,7 +2207,10 @@
         </p:spPr>
         <p:txBody>
           <a:bodyPr/>
-          <a:p/>
+          <a:lstStyle/>
+          <a:p>
+            <a:endParaRPr/>
+          </a:p>
         </p:txBody>
       </p:sp>
       <p:sp>
@@ -2397,7 +2409,10 @@
         </p:spPr>
         <p:txBody>
           <a:bodyPr/>
-          <a:p/>
+          <a:lstStyle/>
+          <a:p>
+            <a:endParaRPr/>
+          </a:p>
         </p:txBody>
       </p:sp>
       <p:sp>
@@ -2428,7 +2443,10 @@
         </p:spPr>
         <p:txBody>
           <a:bodyPr/>
-          <a:p/>
+          <a:lstStyle/>
+          <a:p>
+            <a:endParaRPr/>
+          </a:p>
         </p:txBody>
       </p:sp>
       <p:sp>
@@ -2495,7 +2513,10 @@
         </p:spPr>
         <p:txBody>
           <a:bodyPr/>
-          <a:p/>
+          <a:lstStyle/>
+          <a:p>
+            <a:endParaRPr/>
+          </a:p>
         </p:txBody>
       </p:sp>
       <p:sp>
@@ -2562,7 +2583,10 @@
         </p:spPr>
         <p:txBody>
           <a:bodyPr/>
-          <a:p/>
+          <a:lstStyle/>
+          <a:p>
+            <a:endParaRPr/>
+          </a:p>
         </p:txBody>
       </p:sp>
       <p:sp>
@@ -2631,7 +2655,7 @@
                   <a:srgbClr val="64748B"/>
                 </a:solidFill>
               </a:rPr>
-              <a:t xml:space="preserve">Машинное обучение · </a:t>
+              <a:t>Машинное обучение · </a:t>
             </a:r>
             <a:r>
               <a:rPr lang="ru-RU" sz="1000" dirty="0">
@@ -2639,7 +2663,7 @@
                   <a:srgbClr val="64748B"/>
                 </a:solidFill>
               </a:rPr>
-              <a:t xml:space="preserve">МИФИ / </a:t>
+              <a:t>МИФИ / </a:t>
             </a:r>
             <a:r>
               <a:rPr lang="en-US" sz="1000" dirty="0">
@@ -2655,7 +2679,7 @@
                   <a:srgbClr val="64748B"/>
                 </a:solidFill>
               </a:rPr>
-              <a:t xml:space="preserve"> </a:t>
+              <a:t> </a:t>
             </a:r>
             <a:r>
               <a:rPr lang="en-US" sz="1000" dirty="0">
@@ -2671,7 +2695,7 @@
                   <a:srgbClr val="64748B"/>
                 </a:solidFill>
               </a:rPr>
-              <a:t xml:space="preserve"> Бегали уулу Манас </a:t>
+              <a:t> Бегали уулу Манас </a:t>
             </a:r>
             <a:r>
               <a:rPr lang="en-US" sz="1000" dirty="0">
@@ -2744,7 +2768,10 @@
         </p:spPr>
         <p:txBody>
           <a:bodyPr/>
-          <a:p/>
+          <a:lstStyle/>
+          <a:p>
+            <a:endParaRPr/>
+          </a:p>
         </p:txBody>
       </p:sp>
       <p:sp>
@@ -2809,7 +2836,10 @@
         </p:spPr>
         <p:txBody>
           <a:bodyPr/>
-          <a:p/>
+          <a:lstStyle/>
+          <a:p>
+            <a:endParaRPr/>
+          </a:p>
         </p:txBody>
       </p:sp>
       <p:sp>
@@ -2845,7 +2875,10 @@
         </p:spPr>
         <p:txBody>
           <a:bodyPr/>
-          <a:p/>
+          <a:lstStyle/>
+          <a:p>
+            <a:endParaRPr/>
+          </a:p>
         </p:txBody>
       </p:sp>
       <p:sp>
@@ -2946,7 +2979,10 @@
         </p:spPr>
         <p:txBody>
           <a:bodyPr/>
-          <a:p/>
+          <a:lstStyle/>
+          <a:p>
+            <a:endParaRPr/>
+          </a:p>
         </p:txBody>
       </p:sp>
       <p:sp>
@@ -3093,7 +3129,7 @@
                   <a:srgbClr val="1E2761"/>
                 </a:solidFill>
               </a:rPr>
-              <a:t xml:space="preserve">Построить модель, предсказывающую вероятность </a:t>
+              <a:t>Построить модель, предсказывающую вероятность </a:t>
             </a:r>
             <a:r>
               <a:rPr lang="en-US" sz="1200" b="1" dirty="0">
@@ -3109,7 +3145,7 @@
                   <a:srgbClr val="1E2761"/>
                 </a:solidFill>
               </a:rPr>
-              <a:t xml:space="preserve"> пользователя на сайте.</a:t>
+              <a:t> пользователя на сайте.</a:t>
             </a:r>
             <a:endParaRPr lang="en-US" sz="1200" dirty="0"/>
           </a:p>
@@ -3148,7 +3184,10 @@
         </p:spPr>
         <p:txBody>
           <a:bodyPr/>
-          <a:p/>
+          <a:lstStyle/>
+          <a:p>
+            <a:endParaRPr/>
+          </a:p>
         </p:txBody>
       </p:sp>
       <p:sp>
@@ -3213,7 +3252,10 @@
         </p:spPr>
         <p:txBody>
           <a:bodyPr/>
-          <a:p/>
+          <a:lstStyle/>
+          <a:p>
+            <a:endParaRPr/>
+          </a:p>
         </p:txBody>
       </p:sp>
       <p:sp>
@@ -3314,7 +3356,10 @@
         </p:spPr>
         <p:txBody>
           <a:bodyPr/>
-          <a:p/>
+          <a:lstStyle/>
+          <a:p>
+            <a:endParaRPr/>
+          </a:p>
         </p:txBody>
       </p:sp>
       <p:sp>
@@ -3415,7 +3460,10 @@
         </p:spPr>
         <p:txBody>
           <a:bodyPr/>
-          <a:p/>
+          <a:lstStyle/>
+          <a:p>
+            <a:endParaRPr/>
+          </a:p>
         </p:txBody>
       </p:sp>
       <p:sp>
@@ -3518,7 +3566,10 @@
         </p:spPr>
         <p:txBody>
           <a:bodyPr/>
-          <a:p/>
+          <a:lstStyle/>
+          <a:p>
+            <a:endParaRPr/>
+          </a:p>
         </p:txBody>
       </p:sp>
       <p:sp>
@@ -3616,7 +3667,10 @@
         </p:spPr>
         <p:txBody>
           <a:bodyPr/>
-          <a:p/>
+          <a:lstStyle/>
+          <a:p>
+            <a:endParaRPr/>
+          </a:p>
         </p:txBody>
       </p:sp>
       <p:sp>
@@ -3681,7 +3735,10 @@
         </p:spPr>
         <p:txBody>
           <a:bodyPr/>
-          <a:p/>
+          <a:lstStyle/>
+          <a:p>
+            <a:endParaRPr/>
+          </a:p>
         </p:txBody>
       </p:sp>
       <p:sp>
@@ -3717,7 +3774,10 @@
         </p:spPr>
         <p:txBody>
           <a:bodyPr/>
-          <a:p/>
+          <a:lstStyle/>
+          <a:p>
+            <a:endParaRPr/>
+          </a:p>
         </p:txBody>
       </p:sp>
       <p:sp>
@@ -3746,7 +3806,10 @@
         </p:spPr>
         <p:txBody>
           <a:bodyPr/>
-          <a:p/>
+          <a:lstStyle/>
+          <a:p>
+            <a:endParaRPr/>
+          </a:p>
         </p:txBody>
       </p:sp>
       <p:sp>
@@ -3890,7 +3953,10 @@
         </p:spPr>
         <p:txBody>
           <a:bodyPr/>
-          <a:p/>
+          <a:lstStyle/>
+          <a:p>
+            <a:endParaRPr/>
+          </a:p>
         </p:txBody>
       </p:sp>
       <p:sp>
@@ -3919,7 +3985,10 @@
         </p:spPr>
         <p:txBody>
           <a:bodyPr/>
-          <a:p/>
+          <a:lstStyle/>
+          <a:p>
+            <a:endParaRPr/>
+          </a:p>
         </p:txBody>
       </p:sp>
       <p:sp>
@@ -4063,7 +4132,10 @@
         </p:spPr>
         <p:txBody>
           <a:bodyPr/>
-          <a:p/>
+          <a:lstStyle/>
+          <a:p>
+            <a:endParaRPr/>
+          </a:p>
         </p:txBody>
       </p:sp>
       <p:sp>
@@ -4092,7 +4164,10 @@
         </p:spPr>
         <p:txBody>
           <a:bodyPr/>
-          <a:p/>
+          <a:lstStyle/>
+          <a:p>
+            <a:endParaRPr/>
+          </a:p>
         </p:txBody>
       </p:sp>
       <p:sp>
@@ -4236,7 +4311,10 @@
         </p:spPr>
         <p:txBody>
           <a:bodyPr/>
-          <a:p/>
+          <a:lstStyle/>
+          <a:p>
+            <a:endParaRPr/>
+          </a:p>
         </p:txBody>
       </p:sp>
       <p:sp>
@@ -4265,7 +4343,10 @@
         </p:spPr>
         <p:txBody>
           <a:bodyPr/>
-          <a:p/>
+          <a:lstStyle/>
+          <a:p>
+            <a:endParaRPr/>
+          </a:p>
         </p:txBody>
       </p:sp>
       <p:sp>
@@ -4445,7 +4526,10 @@
         </p:spPr>
         <p:txBody>
           <a:bodyPr/>
-          <a:p/>
+          <a:lstStyle/>
+          <a:p>
+            <a:endParaRPr/>
+          </a:p>
         </p:txBody>
       </p:sp>
       <p:sp>
@@ -4474,7 +4558,10 @@
         </p:spPr>
         <p:txBody>
           <a:bodyPr/>
-          <a:p/>
+          <a:lstStyle/>
+          <a:p>
+            <a:endParaRPr/>
+          </a:p>
         </p:txBody>
       </p:sp>
       <p:sp>
@@ -4582,7 +4669,10 @@
         </p:spPr>
         <p:txBody>
           <a:bodyPr/>
-          <a:p/>
+          <a:lstStyle/>
+          <a:p>
+            <a:endParaRPr/>
+          </a:p>
         </p:txBody>
       </p:sp>
       <p:sp>
@@ -4611,7 +4701,10 @@
         </p:spPr>
         <p:txBody>
           <a:bodyPr/>
-          <a:p/>
+          <a:lstStyle/>
+          <a:p>
+            <a:endParaRPr/>
+          </a:p>
         </p:txBody>
       </p:sp>
       <p:sp>
@@ -4719,7 +4812,10 @@
         </p:spPr>
         <p:txBody>
           <a:bodyPr/>
-          <a:p/>
+          <a:lstStyle/>
+          <a:p>
+            <a:endParaRPr/>
+          </a:p>
         </p:txBody>
       </p:sp>
       <p:sp>
@@ -4748,7 +4844,10 @@
         </p:spPr>
         <p:txBody>
           <a:bodyPr/>
-          <a:p/>
+          <a:lstStyle/>
+          <a:p>
+            <a:endParaRPr/>
+          </a:p>
         </p:txBody>
       </p:sp>
       <p:sp>
@@ -4856,7 +4955,10 @@
         </p:spPr>
         <p:txBody>
           <a:bodyPr/>
-          <a:p/>
+          <a:lstStyle/>
+          <a:p>
+            <a:endParaRPr/>
+          </a:p>
         </p:txBody>
       </p:sp>
       <p:sp>
@@ -4885,7 +4987,10 @@
         </p:spPr>
         <p:txBody>
           <a:bodyPr/>
-          <a:p/>
+          <a:lstStyle/>
+          <a:p>
+            <a:endParaRPr/>
+          </a:p>
         </p:txBody>
       </p:sp>
       <p:sp>
@@ -4993,7 +5098,10 @@
         </p:spPr>
         <p:txBody>
           <a:bodyPr/>
-          <a:p/>
+          <a:lstStyle/>
+          <a:p>
+            <a:endParaRPr/>
+          </a:p>
         </p:txBody>
       </p:sp>
       <p:sp>
@@ -5022,7 +5130,10 @@
         </p:spPr>
         <p:txBody>
           <a:bodyPr/>
-          <a:p/>
+          <a:lstStyle/>
+          <a:p>
+            <a:endParaRPr/>
+          </a:p>
         </p:txBody>
       </p:sp>
       <p:sp>
@@ -5130,7 +5241,10 @@
         </p:spPr>
         <p:txBody>
           <a:bodyPr/>
-          <a:p/>
+          <a:lstStyle/>
+          <a:p>
+            <a:endParaRPr/>
+          </a:p>
         </p:txBody>
       </p:sp>
       <p:sp>
@@ -5159,7 +5273,10 @@
         </p:spPr>
         <p:txBody>
           <a:bodyPr/>
-          <a:p/>
+          <a:lstStyle/>
+          <a:p>
+            <a:endParaRPr/>
+          </a:p>
         </p:txBody>
       </p:sp>
       <p:sp>
@@ -5293,7 +5410,10 @@
         </p:spPr>
         <p:txBody>
           <a:bodyPr/>
-          <a:p/>
+          <a:lstStyle/>
+          <a:p>
+            <a:endParaRPr/>
+          </a:p>
         </p:txBody>
       </p:sp>
       <p:sp>
@@ -5358,7 +5478,10 @@
         </p:spPr>
         <p:txBody>
           <a:bodyPr/>
-          <a:p/>
+          <a:lstStyle/>
+          <a:p>
+            <a:endParaRPr/>
+          </a:p>
         </p:txBody>
       </p:sp>
       <p:sp>
@@ -5387,7 +5510,10 @@
         </p:spPr>
         <p:txBody>
           <a:bodyPr/>
-          <a:p/>
+          <a:lstStyle/>
+          <a:p>
+            <a:endParaRPr/>
+          </a:p>
         </p:txBody>
       </p:sp>
       <p:sp>
@@ -5420,7 +5546,7 @@
                   <a:srgbClr val="02C39A"/>
                 </a:solidFill>
               </a:rPr>
-              <a:t xml:space="preserve">Итого: 23 признака для модели  |  </a:t>
+              <a:t>Итого: 23 признака для модели  |  </a:t>
             </a:r>
             <a:r>
               <a:rPr lang="ru-RU" sz="1200" b="1" dirty="0">
@@ -5436,7 +5562,7 @@
                   <a:srgbClr val="02C39A"/>
                 </a:solidFill>
               </a:rPr>
-              <a:t xml:space="preserve"> </a:t>
+              <a:t> </a:t>
             </a:r>
             <a:r>
               <a:rPr lang="en-US" sz="1200" b="1" dirty="0" err="1">
@@ -5452,7 +5578,7 @@
                   <a:srgbClr val="02C39A"/>
                 </a:solidFill>
               </a:rPr>
-              <a:t xml:space="preserve">  +  7 </a:t>
+              <a:t>  +  7 </a:t>
             </a:r>
             <a:r>
               <a:rPr lang="en-US" sz="1200" b="1" dirty="0" err="1">
@@ -5492,7 +5618,10 @@
         </p:spPr>
         <p:txBody>
           <a:bodyPr/>
-          <a:p/>
+          <a:lstStyle/>
+          <a:p>
+            <a:endParaRPr/>
+          </a:p>
         </p:txBody>
       </p:sp>
       <p:sp>
@@ -5573,7 +5702,10 @@
         </p:spPr>
         <p:txBody>
           <a:bodyPr/>
-          <a:p/>
+          <a:lstStyle/>
+          <a:p>
+            <a:endParaRPr/>
+          </a:p>
         </p:txBody>
       </p:sp>
       <p:sp>
@@ -5674,7 +5806,10 @@
         </p:spPr>
         <p:txBody>
           <a:bodyPr/>
-          <a:p/>
+          <a:lstStyle/>
+          <a:p>
+            <a:endParaRPr/>
+          </a:p>
         </p:txBody>
       </p:sp>
       <p:sp>
@@ -5775,7 +5910,10 @@
         </p:spPr>
         <p:txBody>
           <a:bodyPr/>
-          <a:p/>
+          <a:lstStyle/>
+          <a:p>
+            <a:endParaRPr/>
+          </a:p>
         </p:txBody>
       </p:sp>
       <p:sp>
@@ -5876,7 +6014,10 @@
         </p:spPr>
         <p:txBody>
           <a:bodyPr/>
-          <a:p/>
+          <a:lstStyle/>
+          <a:p>
+            <a:endParaRPr/>
+          </a:p>
         </p:txBody>
       </p:sp>
       <p:sp>
@@ -5977,7 +6118,10 @@
         </p:spPr>
         <p:txBody>
           <a:bodyPr/>
-          <a:p/>
+          <a:lstStyle/>
+          <a:p>
+            <a:endParaRPr/>
+          </a:p>
         </p:txBody>
       </p:sp>
       <p:sp>
@@ -6078,7 +6222,10 @@
         </p:spPr>
         <p:txBody>
           <a:bodyPr/>
-          <a:p/>
+          <a:lstStyle/>
+          <a:p>
+            <a:endParaRPr/>
+          </a:p>
         </p:txBody>
       </p:sp>
       <p:sp>
@@ -6179,7 +6326,10 @@
         </p:spPr>
         <p:txBody>
           <a:bodyPr/>
-          <a:p/>
+          <a:lstStyle/>
+          <a:p>
+            <a:endParaRPr/>
+          </a:p>
         </p:txBody>
       </p:sp>
       <p:sp>
@@ -6280,7 +6430,10 @@
         </p:spPr>
         <p:txBody>
           <a:bodyPr/>
-          <a:p/>
+          <a:lstStyle/>
+          <a:p>
+            <a:endParaRPr/>
+          </a:p>
         </p:txBody>
       </p:sp>
       <p:sp>
@@ -6381,7 +6534,10 @@
         </p:spPr>
         <p:txBody>
           <a:bodyPr/>
-          <a:p/>
+          <a:lstStyle/>
+          <a:p>
+            <a:endParaRPr/>
+          </a:p>
         </p:txBody>
       </p:sp>
       <p:sp>
@@ -6482,7 +6638,10 @@
         </p:spPr>
         <p:txBody>
           <a:bodyPr/>
-          <a:p/>
+          <a:lstStyle/>
+          <a:p>
+            <a:endParaRPr/>
+          </a:p>
         </p:txBody>
       </p:sp>
       <p:sp>
@@ -6585,7 +6744,10 @@
         </p:spPr>
         <p:txBody>
           <a:bodyPr/>
-          <a:p/>
+          <a:lstStyle/>
+          <a:p>
+            <a:endParaRPr/>
+          </a:p>
         </p:txBody>
       </p:sp>
       <p:sp>
@@ -6650,7 +6812,10 @@
         </p:spPr>
         <p:txBody>
           <a:bodyPr/>
-          <a:p/>
+          <a:lstStyle/>
+          <a:p>
+            <a:endParaRPr/>
+          </a:p>
         </p:txBody>
       </p:sp>
       <p:sp>
@@ -6751,7 +6916,10 @@
         </p:spPr>
         <p:txBody>
           <a:bodyPr/>
-          <a:p/>
+          <a:lstStyle/>
+          <a:p>
+            <a:endParaRPr/>
+          </a:p>
         </p:txBody>
       </p:sp>
       <p:sp>
@@ -6852,7 +7020,10 @@
         </p:spPr>
         <p:txBody>
           <a:bodyPr/>
-          <a:p/>
+          <a:lstStyle/>
+          <a:p>
+            <a:endParaRPr/>
+          </a:p>
         </p:txBody>
       </p:sp>
       <p:sp>
@@ -6953,7 +7124,10 @@
         </p:spPr>
         <p:txBody>
           <a:bodyPr/>
-          <a:p/>
+          <a:lstStyle/>
+          <a:p>
+            <a:endParaRPr/>
+          </a:p>
         </p:txBody>
       </p:sp>
       <p:sp>
@@ -7054,7 +7228,10 @@
         </p:spPr>
         <p:txBody>
           <a:bodyPr/>
-          <a:p/>
+          <a:lstStyle/>
+          <a:p>
+            <a:endParaRPr/>
+          </a:p>
         </p:txBody>
       </p:sp>
       <p:sp>
@@ -7155,7 +7332,10 @@
         </p:spPr>
         <p:txBody>
           <a:bodyPr/>
-          <a:p/>
+          <a:lstStyle/>
+          <a:p>
+            <a:endParaRPr/>
+          </a:p>
         </p:txBody>
       </p:sp>
       <p:sp>
@@ -7256,7 +7436,10 @@
         </p:spPr>
         <p:txBody>
           <a:bodyPr/>
-          <a:p/>
+          <a:lstStyle/>
+          <a:p>
+            <a:endParaRPr/>
+          </a:p>
         </p:txBody>
       </p:sp>
       <p:sp>
@@ -7361,7 +7544,10 @@
         </p:spPr>
         <p:txBody>
           <a:bodyPr/>
-          <a:p/>
+          <a:lstStyle/>
+          <a:p>
+            <a:endParaRPr/>
+          </a:p>
         </p:txBody>
       </p:sp>
       <p:sp>
@@ -7459,7 +7645,10 @@
         </p:spPr>
         <p:txBody>
           <a:bodyPr/>
-          <a:p/>
+          <a:lstStyle/>
+          <a:p>
+            <a:endParaRPr/>
+          </a:p>
         </p:txBody>
       </p:sp>
       <p:sp>
@@ -7524,7 +7713,10 @@
         </p:spPr>
         <p:txBody>
           <a:bodyPr/>
-          <a:p/>
+          <a:lstStyle/>
+          <a:p>
+            <a:endParaRPr/>
+          </a:p>
         </p:txBody>
       </p:sp>
       <p:sp>
@@ -7560,7 +7752,10 @@
         </p:spPr>
         <p:txBody>
           <a:bodyPr/>
-          <a:p/>
+          <a:lstStyle/>
+          <a:p>
+            <a:endParaRPr/>
+          </a:p>
         </p:txBody>
       </p:sp>
       <p:sp>
@@ -7589,7 +7784,10 @@
         </p:spPr>
         <p:txBody>
           <a:bodyPr/>
-          <a:p/>
+          <a:lstStyle/>
+          <a:p>
+            <a:endParaRPr/>
+          </a:p>
         </p:txBody>
       </p:sp>
       <p:sp>
@@ -7700,7 +7898,23 @@
                   <a:srgbClr val="1E2761"/>
                 </a:solidFill>
               </a:rPr>
-              <a:t>Позитивных в train: 2.10%</a:t>
+              <a:t>Позитивных в train: 2.</a:t>
+            </a:r>
+            <a:r>
+              <a:rPr lang="ru-RU" sz="1100" dirty="0">
+                <a:solidFill>
+                  <a:srgbClr val="1E2761"/>
+                </a:solidFill>
+              </a:rPr>
+              <a:t>09</a:t>
+            </a:r>
+            <a:r>
+              <a:rPr lang="en-US" sz="1100" dirty="0">
+                <a:solidFill>
+                  <a:srgbClr val="1E2761"/>
+                </a:solidFill>
+              </a:rPr>
+              <a:t>%</a:t>
             </a:r>
             <a:endParaRPr lang="en-US" sz="1100" dirty="0"/>
           </a:p>
@@ -7739,7 +7953,10 @@
         </p:spPr>
         <p:txBody>
           <a:bodyPr/>
-          <a:p/>
+          <a:lstStyle/>
+          <a:p>
+            <a:endParaRPr/>
+          </a:p>
         </p:txBody>
       </p:sp>
       <p:sp>
@@ -7768,7 +7985,10 @@
         </p:spPr>
         <p:txBody>
           <a:bodyPr/>
-          <a:p/>
+          <a:lstStyle/>
+          <a:p>
+            <a:endParaRPr/>
+          </a:p>
         </p:txBody>
       </p:sp>
       <p:sp>
@@ -7930,7 +8150,10 @@
         </p:spPr>
         <p:txBody>
           <a:bodyPr/>
-          <a:p/>
+          <a:lstStyle/>
+          <a:p>
+            <a:endParaRPr/>
+          </a:p>
         </p:txBody>
       </p:sp>
       <p:sp>
@@ -7959,7 +8182,10 @@
         </p:spPr>
         <p:txBody>
           <a:bodyPr/>
-          <a:p/>
+          <a:lstStyle/>
+          <a:p>
+            <a:endParaRPr/>
+          </a:p>
         </p:txBody>
       </p:sp>
       <p:sp>
@@ -8103,7 +8329,10 @@
         </p:spPr>
         <p:txBody>
           <a:bodyPr/>
-          <a:p/>
+          <a:lstStyle/>
+          <a:p>
+            <a:endParaRPr/>
+          </a:p>
         </p:txBody>
       </p:sp>
       <p:sp>
@@ -8191,7 +8420,10 @@
         </p:spPr>
         <p:txBody>
           <a:bodyPr/>
-          <a:p/>
+          <a:lstStyle/>
+          <a:p>
+            <a:endParaRPr/>
+          </a:p>
         </p:txBody>
       </p:sp>
       <p:sp>
@@ -8305,7 +8537,10 @@
         </p:spPr>
         <p:txBody>
           <a:bodyPr/>
-          <a:p/>
+          <a:lstStyle/>
+          <a:p>
+            <a:endParaRPr/>
+          </a:p>
         </p:txBody>
       </p:sp>
       <p:sp>
@@ -8370,7 +8605,10 @@
         </p:spPr>
         <p:txBody>
           <a:bodyPr/>
-          <a:p/>
+          <a:lstStyle/>
+          <a:p>
+            <a:endParaRPr/>
+          </a:p>
         </p:txBody>
       </p:sp>
       <p:sp>
@@ -8406,7 +8644,10 @@
         </p:spPr>
         <p:txBody>
           <a:bodyPr/>
-          <a:p/>
+          <a:lstStyle/>
+          <a:p>
+            <a:endParaRPr/>
+          </a:p>
         </p:txBody>
       </p:sp>
       <p:sp>
@@ -8494,7 +8735,10 @@
         </p:spPr>
         <p:txBody>
           <a:bodyPr/>
-          <a:p/>
+          <a:lstStyle/>
+          <a:p>
+            <a:endParaRPr/>
+          </a:p>
         </p:txBody>
       </p:sp>
       <p:sp>
@@ -8611,7 +8855,10 @@
         </p:spPr>
         <p:txBody>
           <a:bodyPr/>
-          <a:p/>
+          <a:lstStyle/>
+          <a:p>
+            <a:endParaRPr/>
+          </a:p>
         </p:txBody>
       </p:sp>
       <p:sp>
@@ -8640,7 +8887,10 @@
         </p:spPr>
         <p:txBody>
           <a:bodyPr/>
-          <a:p/>
+          <a:lstStyle/>
+          <a:p>
+            <a:endParaRPr/>
+          </a:p>
         </p:txBody>
       </p:sp>
       <p:sp>
@@ -8779,7 +9029,10 @@
         </p:spPr>
         <p:txBody>
           <a:bodyPr/>
-          <a:p/>
+          <a:lstStyle/>
+          <a:p>
+            <a:endParaRPr/>
+          </a:p>
         </p:txBody>
       </p:sp>
       <p:sp>
@@ -8808,7 +9061,10 @@
         </p:spPr>
         <p:txBody>
           <a:bodyPr/>
-          <a:p/>
+          <a:lstStyle/>
+          <a:p>
+            <a:endParaRPr/>
+          </a:p>
         </p:txBody>
       </p:sp>
       <p:sp>
@@ -8947,7 +9203,10 @@
         </p:spPr>
         <p:txBody>
           <a:bodyPr/>
-          <a:p/>
+          <a:lstStyle/>
+          <a:p>
+            <a:endParaRPr/>
+          </a:p>
         </p:txBody>
       </p:sp>
       <p:sp>
@@ -8976,7 +9235,10 @@
         </p:spPr>
         <p:txBody>
           <a:bodyPr/>
-          <a:p/>
+          <a:lstStyle/>
+          <a:p>
+            <a:endParaRPr/>
+          </a:p>
         </p:txBody>
       </p:sp>
       <p:sp>
@@ -9115,7 +9377,10 @@
         </p:spPr>
         <p:txBody>
           <a:bodyPr/>
-          <a:p/>
+          <a:lstStyle/>
+          <a:p>
+            <a:endParaRPr/>
+          </a:p>
         </p:txBody>
       </p:sp>
       <p:sp>
@@ -9144,7 +9409,10 @@
         </p:spPr>
         <p:txBody>
           <a:bodyPr/>
-          <a:p/>
+          <a:lstStyle/>
+          <a:p>
+            <a:endParaRPr/>
+          </a:p>
         </p:txBody>
       </p:sp>
       <p:sp>
@@ -9283,7 +9551,10 @@
         </p:spPr>
         <p:txBody>
           <a:bodyPr/>
-          <a:p/>
+          <a:lstStyle/>
+          <a:p>
+            <a:endParaRPr/>
+          </a:p>
         </p:txBody>
       </p:sp>
       <p:sp>
@@ -9312,7 +9583,10 @@
         </p:spPr>
         <p:txBody>
           <a:bodyPr/>
-          <a:p/>
+          <a:lstStyle/>
+          <a:p>
+            <a:endParaRPr/>
+          </a:p>
         </p:txBody>
       </p:sp>
       <p:sp>
@@ -9482,7 +9756,10 @@
         </p:spPr>
         <p:txBody>
           <a:bodyPr/>
-          <a:p/>
+          <a:lstStyle/>
+          <a:p>
+            <a:endParaRPr/>
+          </a:p>
         </p:txBody>
       </p:sp>
       <p:sp>
@@ -9547,7 +9824,10 @@
         </p:spPr>
         <p:txBody>
           <a:bodyPr/>
-          <a:p/>
+          <a:lstStyle/>
+          <a:p>
+            <a:endParaRPr/>
+          </a:p>
         </p:txBody>
       </p:sp>
       <p:sp>
@@ -9583,7 +9863,10 @@
         </p:spPr>
         <p:txBody>
           <a:bodyPr/>
-          <a:p/>
+          <a:lstStyle/>
+          <a:p>
+            <a:endParaRPr/>
+          </a:p>
         </p:txBody>
       </p:sp>
       <p:sp>
@@ -9612,7 +9895,10 @@
         </p:spPr>
         <p:txBody>
           <a:bodyPr/>
-          <a:p/>
+          <a:lstStyle/>
+          <a:p>
+            <a:endParaRPr/>
+          </a:p>
         </p:txBody>
       </p:sp>
       <p:sp>
@@ -9806,7 +10092,10 @@
         </p:spPr>
         <p:txBody>
           <a:bodyPr/>
-          <a:p/>
+          <a:lstStyle/>
+          <a:p>
+            <a:endParaRPr/>
+          </a:p>
         </p:txBody>
       </p:sp>
       <p:sp>
@@ -9835,7 +10124,10 @@
         </p:spPr>
         <p:txBody>
           <a:bodyPr/>
-          <a:p/>
+          <a:lstStyle/>
+          <a:p>
+            <a:endParaRPr/>
+          </a:p>
         </p:txBody>
       </p:sp>
       <p:sp>
@@ -10029,7 +10321,10 @@
         </p:spPr>
         <p:txBody>
           <a:bodyPr/>
-          <a:p/>
+          <a:lstStyle/>
+          <a:p>
+            <a:endParaRPr/>
+          </a:p>
         </p:txBody>
       </p:sp>
       <p:sp>
@@ -10058,7 +10353,10 @@
         </p:spPr>
         <p:txBody>
           <a:bodyPr/>
-          <a:p/>
+          <a:lstStyle/>
+          <a:p>
+            <a:endParaRPr/>
+          </a:p>
         </p:txBody>
       </p:sp>
       <p:sp>
@@ -10252,7 +10550,10 @@
         </p:spPr>
         <p:txBody>
           <a:bodyPr/>
-          <a:p/>
+          <a:lstStyle/>
+          <a:p>
+            <a:endParaRPr/>
+          </a:p>
         </p:txBody>
       </p:sp>
       <p:sp>
@@ -10281,7 +10582,10 @@
         </p:spPr>
         <p:txBody>
           <a:bodyPr/>
-          <a:p/>
+          <a:lstStyle/>
+          <a:p>
+            <a:endParaRPr/>
+          </a:p>
         </p:txBody>
       </p:sp>
       <p:sp>
@@ -10439,7 +10743,10 @@
         </p:spPr>
         <p:txBody>
           <a:bodyPr/>
-          <a:p/>
+          <a:lstStyle/>
+          <a:p>
+            <a:endParaRPr/>
+          </a:p>
         </p:txBody>
       </p:sp>
       <p:sp>
@@ -10506,7 +10813,10 @@
         </p:spPr>
         <p:txBody>
           <a:bodyPr/>
-          <a:p/>
+          <a:lstStyle/>
+          <a:p>
+            <a:endParaRPr/>
+          </a:p>
         </p:txBody>
       </p:sp>
       <p:sp>
@@ -10648,7 +10958,10 @@
         </p:spPr>
         <p:txBody>
           <a:bodyPr/>
-          <a:p/>
+          <a:lstStyle/>
+          <a:p>
+            <a:endParaRPr/>
+          </a:p>
         </p:txBody>
       </p:sp>
       <p:sp>
@@ -10790,7 +11103,10 @@
         </p:spPr>
         <p:txBody>
           <a:bodyPr/>
-          <a:p/>
+          <a:lstStyle/>
+          <a:p>
+            <a:endParaRPr/>
+          </a:p>
         </p:txBody>
       </p:sp>
       <p:sp>
@@ -10932,7 +11248,10 @@
         </p:spPr>
         <p:txBody>
           <a:bodyPr/>
-          <a:p/>
+          <a:lstStyle/>
+          <a:p>
+            <a:endParaRPr/>
+          </a:p>
         </p:txBody>
       </p:sp>
       <p:sp>
@@ -11079,7 +11398,10 @@
         </p:spPr>
         <p:txBody>
           <a:bodyPr/>
-          <a:p/>
+          <a:lstStyle/>
+          <a:p>
+            <a:endParaRPr/>
+          </a:p>
         </p:txBody>
       </p:sp>
       <p:sp>
@@ -11185,22 +11507,6 @@
                 </a:solidFill>
               </a:rPr>
               <a:t>5.27 мс</a:t>
-            </a:r>
-            <a:r>
-              <a:rPr lang="ru-RU" sz="1100" b="1" dirty="0">
-                <a:solidFill>
-                  <a:srgbClr val="FFFFFF"/>
-                </a:solidFill>
-              </a:rPr>
-              <a:t/>
-            </a:r>
-            <a:r>
-              <a:rPr lang="en-US" sz="1100" b="1" dirty="0">
-                <a:solidFill>
-                  <a:srgbClr val="FFFFFF"/>
-                </a:solidFill>
-              </a:rPr>
-              <a:t xml:space="preserve"/>
             </a:r>
             <a:endParaRPr lang="en-US" sz="1100" dirty="0"/>
           </a:p>
@@ -11236,7 +11542,10 @@
         </p:spPr>
         <p:txBody>
           <a:bodyPr/>
-          <a:p/>
+          <a:lstStyle/>
+          <a:p>
+            <a:endParaRPr/>
+          </a:p>
         </p:txBody>
       </p:sp>
       <p:sp>
@@ -11341,7 +11650,10 @@
         </p:spPr>
         <p:txBody>
           <a:bodyPr/>
-          <a:p/>
+          <a:lstStyle/>
+          <a:p>
+            <a:endParaRPr/>
+          </a:p>
         </p:txBody>
       </p:sp>
       <p:sp>
@@ -11411,22 +11723,6 @@
                 </a:solidFill>
               </a:rPr>
               <a:t>8.77 мс</a:t>
-            </a:r>
-            <a:r>
-              <a:rPr lang="ru-RU" sz="1100" b="1" dirty="0">
-                <a:solidFill>
-                  <a:srgbClr val="FFFFFF"/>
-                </a:solidFill>
-              </a:rPr>
-              <a:t/>
-            </a:r>
-            <a:r>
-              <a:rPr lang="en-US" sz="1100" b="1" dirty="0">
-                <a:solidFill>
-                  <a:srgbClr val="FFFFFF"/>
-                </a:solidFill>
-              </a:rPr>
-              <a:t xml:space="preserve"/>
             </a:r>
             <a:endParaRPr lang="en-US" sz="1100" dirty="0"/>
           </a:p>
@@ -11462,7 +11758,10 @@
         </p:spPr>
         <p:txBody>
           <a:bodyPr/>
-          <a:p/>
+          <a:lstStyle/>
+          <a:p>
+            <a:endParaRPr/>
+          </a:p>
         </p:txBody>
       </p:sp>
       <p:sp>
@@ -11567,7 +11866,10 @@
         </p:spPr>
         <p:txBody>
           <a:bodyPr/>
-          <a:p/>
+          <a:lstStyle/>
+          <a:p>
+            <a:endParaRPr/>
+          </a:p>
         </p:txBody>
       </p:sp>
       <p:sp>
@@ -11705,7 +12007,10 @@
         </p:spPr>
         <p:txBody>
           <a:bodyPr/>
-          <a:p/>
+          <a:lstStyle/>
+          <a:p>
+            <a:endParaRPr/>
+          </a:p>
         </p:txBody>
       </p:sp>
       <p:sp>
@@ -11738,7 +12043,10 @@
         </p:spPr>
         <p:txBody>
           <a:bodyPr/>
-          <a:p/>
+          <a:lstStyle/>
+          <a:p>
+            <a:endParaRPr/>
+          </a:p>
         </p:txBody>
       </p:sp>
       <p:sp>
@@ -11767,7 +12075,10 @@
         </p:spPr>
         <p:txBody>
           <a:bodyPr/>
-          <a:p/>
+          <a:lstStyle/>
+          <a:p>
+            <a:endParaRPr/>
+          </a:p>
         </p:txBody>
       </p:sp>
       <p:sp>
@@ -11841,7 +12152,10 @@
         </p:spPr>
         <p:txBody>
           <a:bodyPr/>
-          <a:p/>
+          <a:lstStyle/>
+          <a:p>
+            <a:endParaRPr/>
+          </a:p>
         </p:txBody>
       </p:sp>
       <p:sp>
@@ -11987,7 +12301,10 @@
         </p:spPr>
         <p:txBody>
           <a:bodyPr/>
-          <a:p/>
+          <a:lstStyle/>
+          <a:p>
+            <a:endParaRPr/>
+          </a:p>
         </p:txBody>
       </p:sp>
       <p:sp>
@@ -12133,7 +12450,10 @@
         </p:spPr>
         <p:txBody>
           <a:bodyPr/>
-          <a:p/>
+          <a:lstStyle/>
+          <a:p>
+            <a:endParaRPr/>
+          </a:p>
         </p:txBody>
       </p:sp>
       <p:sp>
@@ -12167,22 +12487,6 @@
                 </a:solidFill>
               </a:rPr>
               <a:t>5.27 мс</a:t>
-            </a:r>
-            <a:r>
-              <a:rPr lang="ru-RU" sz="2200" b="1" dirty="0">
-                <a:solidFill>
-                  <a:srgbClr val="02C39A"/>
-                </a:solidFill>
-              </a:rPr>
-              <a:t/>
-            </a:r>
-            <a:r>
-              <a:rPr lang="en-US" sz="2200" b="1" dirty="0">
-                <a:solidFill>
-                  <a:srgbClr val="02C39A"/>
-                </a:solidFill>
-              </a:rPr>
-              <a:t xml:space="preserve"/>
             </a:r>
             <a:endParaRPr lang="en-US" sz="2200" dirty="0"/>
           </a:p>
@@ -12295,7 +12599,10 @@
         </p:spPr>
         <p:txBody>
           <a:bodyPr/>
-          <a:p/>
+          <a:lstStyle/>
+          <a:p>
+            <a:endParaRPr/>
+          </a:p>
         </p:txBody>
       </p:sp>
       <p:sp>
@@ -12468,7 +12775,10 @@
         </p:spPr>
         <p:txBody>
           <a:bodyPr/>
-          <a:p/>
+          <a:lstStyle/>
+          <a:p>
+            <a:endParaRPr/>
+          </a:p>
         </p:txBody>
       </p:sp>
       <p:sp>
@@ -12533,7 +12843,10 @@
         </p:spPr>
         <p:txBody>
           <a:bodyPr/>
-          <a:p/>
+          <a:lstStyle/>
+          <a:p>
+            <a:endParaRPr/>
+          </a:p>
         </p:txBody>
       </p:sp>
       <p:sp>
@@ -12598,7 +12911,10 @@
         </p:spPr>
         <p:txBody>
           <a:bodyPr/>
-          <a:p/>
+          <a:lstStyle/>
+          <a:p>
+            <a:endParaRPr/>
+          </a:p>
         </p:txBody>
       </p:sp>
       <p:sp>
@@ -12663,7 +12979,10 @@
         </p:spPr>
         <p:txBody>
           <a:bodyPr/>
-          <a:p/>
+          <a:lstStyle/>
+          <a:p>
+            <a:endParaRPr/>
+          </a:p>
         </p:txBody>
       </p:sp>
       <p:sp>
@@ -12766,7 +13085,10 @@
         </p:spPr>
         <p:txBody>
           <a:bodyPr/>
-          <a:p/>
+          <a:lstStyle/>
+          <a:p>
+            <a:endParaRPr/>
+          </a:p>
         </p:txBody>
       </p:sp>
       <p:sp>
@@ -12872,7 +13194,10 @@
         </p:spPr>
         <p:txBody>
           <a:bodyPr/>
-          <a:p/>
+          <a:lstStyle/>
+          <a:p>
+            <a:endParaRPr/>
+          </a:p>
         </p:txBody>
       </p:sp>
       <p:sp>
@@ -12978,7 +13303,10 @@
         </p:spPr>
         <p:txBody>
           <a:bodyPr/>
-          <a:p/>
+          <a:lstStyle/>
+          <a:p>
+            <a:endParaRPr/>
+          </a:p>
         </p:txBody>
       </p:sp>
       <p:sp>
@@ -13084,7 +13412,10 @@
         </p:spPr>
         <p:txBody>
           <a:bodyPr/>
-          <a:p/>
+          <a:lstStyle/>
+          <a:p>
+            <a:endParaRPr/>
+          </a:p>
         </p:txBody>
       </p:sp>
       <p:sp>
@@ -13190,7 +13521,10 @@
         </p:spPr>
         <p:txBody>
           <a:bodyPr/>
-          <a:p/>
+          <a:lstStyle/>
+          <a:p>
+            <a:endParaRPr/>
+          </a:p>
         </p:txBody>
       </p:sp>
       <p:sp>
@@ -13296,7 +13630,10 @@
         </p:spPr>
         <p:txBody>
           <a:bodyPr/>
-          <a:p/>
+          <a:lstStyle/>
+          <a:p>
+            <a:endParaRPr/>
+          </a:p>
         </p:txBody>
       </p:sp>
       <p:sp>
@@ -13402,7 +13739,10 @@
         </p:spPr>
         <p:txBody>
           <a:bodyPr/>
-          <a:p/>
+          <a:lstStyle/>
+          <a:p>
+            <a:endParaRPr/>
+          </a:p>
         </p:txBody>
       </p:sp>
       <p:sp>
